--- a/curso/pptx/S89.pptx
+++ b/curso/pptx/S89.pptx
@@ -5305,7 +5305,7 @@
                 </a:solidFill>
                 <a:latin typeface="Nunito Sans"/>
               </a:rPr>
-              <a:t>«O universidad o fracaso»</a:t>
+              <a:t>“要么上大学，要么就是失败”</a:t>
             </a:r>
           </a:p>
           <a:p>
@@ -5330,7 +5330,7 @@
                 </a:solidFill>
                 <a:latin typeface="Nunito Sans"/>
               </a:rPr>
-              <a:t>«La FP es para los que no valen»</a:t>
+              <a:t>“职业教育是给不行的人读的”</a:t>
             </a:r>
           </a:p>
           <a:p>
@@ -5355,7 +5355,7 @@
                 </a:solidFill>
                 <a:latin typeface="Nunito Sans"/>
               </a:rPr>
-              <a:t>«Si eliges mal, ya no hay vuelta atrás»</a:t>
+              <a:t>“选错了，就没有回头路了”</a:t>
             </a:r>
           </a:p>
         </p:txBody>
@@ -5485,7 +5485,7 @@
                 </a:solidFill>
                 <a:latin typeface="Nunito Sans"/>
               </a:rPr>
-              <a:t>Hay varios caminos, y </a:t>
+              <a:t>有好几条路，而且它们</a:t>
             </a:r>
             <a:r>
               <a:rPr sz="2600" b="1">
@@ -5494,7 +5494,7 @@
                 </a:solidFill>
                 <a:latin typeface="Nunito Sans"/>
               </a:rPr>
-              <a:t>se cruzan</a:t>
+              <a:t>会交叉</a:t>
             </a:r>
           </a:p>
           <a:p>
@@ -5519,7 +5519,7 @@
                 </a:solidFill>
                 <a:latin typeface="Nunito Sans"/>
               </a:rPr>
-              <a:t>La FP forma profesionales; desde grado superior se llega a la universidad</a:t>
+              <a:t>职业教育培养专业人才；从高级职业教育可以通往大学</a:t>
             </a:r>
           </a:p>
           <a:p>
@@ -5544,7 +5544,7 @@
                 </a:solidFill>
                 <a:latin typeface="Nunito Sans"/>
               </a:rPr>
-              <a:t>Se puede cambiar: de FP a Bachillerato y al revés</a:t>
+              <a:t>可以转换：从职业教育转到高中，反过来也可以</a:t>
             </a:r>
           </a:p>
           <a:p>
@@ -5569,7 +5569,7 @@
                 </a:solidFill>
                 <a:latin typeface="Nunito Sans"/>
               </a:rPr>
-              <a:t>Cada camino vale según tus razones</a:t>
+              <a:t>每条路的价值，取决于你的理由</a:t>
             </a:r>
           </a:p>
         </p:txBody>
@@ -7345,7 +7345,7 @@
                 </a:solidFill>
                 <a:latin typeface="Nunito Sans"/>
               </a:rPr>
-              <a:t>Lo decide el </a:t>
+              <a:t>由 ESO 结束时的</a:t>
             </a:r>
             <a:r>
               <a:rPr sz="2800" b="1">
@@ -7354,7 +7354,7 @@
                 </a:solidFill>
                 <a:latin typeface="Nunito Sans"/>
               </a:rPr>
-              <a:t>equipo de profesores</a:t>
+              <a:t>教师团队</a:t>
             </a:r>
             <a:r>
               <a:rPr sz="2800" b="0">
@@ -7363,7 +7363,7 @@
                 </a:solidFill>
                 <a:latin typeface="Nunito Sans"/>
               </a:rPr>
-              <a:t> al final de la ESO</a:t>
+              <a:t>决定</a:t>
             </a:r>
           </a:p>
           <a:p>
@@ -7388,7 +7388,7 @@
                 </a:solidFill>
                 <a:latin typeface="Nunito Sans"/>
               </a:rPr>
-              <a:t>FP:</a:t>
+              <a:t>FP：</a:t>
             </a:r>
             <a:r>
               <a:rPr sz="2800" b="0">
@@ -7397,7 +7397,7 @@
                 </a:solidFill>
                 <a:latin typeface="Nunito Sans"/>
               </a:rPr>
-              <a:t> Formación Profesional, estudios para aprender una profesión</a:t>
+              <a:t>职业教育，学习一门职业的学业</a:t>
             </a:r>
           </a:p>
           <a:p>
@@ -7422,7 +7422,7 @@
                 </a:solidFill>
                 <a:latin typeface="Nunito Sans"/>
               </a:rPr>
-              <a:t>Sin el título: FP de </a:t>
+              <a:t>没有这个证书：可以读</a:t>
             </a:r>
             <a:r>
               <a:rPr sz="2800" b="1">
@@ -7431,7 +7431,7 @@
                 </a:solidFill>
                 <a:latin typeface="Nunito Sans"/>
               </a:rPr>
-              <a:t>grado básico</a:t>
+              <a:t>基础级</a:t>
             </a:r>
             <a:r>
               <a:rPr sz="2800" b="0">
@@ -7440,7 +7440,7 @@
                 </a:solidFill>
                 <a:latin typeface="Nunito Sans"/>
               </a:rPr>
-              <a:t>, que también lo da</a:t>
+              <a:t> FP，它也会颁发这个证书</a:t>
             </a:r>
           </a:p>
           <a:p>
@@ -7465,7 +7465,7 @@
                 </a:solidFill>
                 <a:latin typeface="Nunito Sans"/>
               </a:rPr>
-              <a:t>La enseñanza es </a:t>
+              <a:t>教育在16岁之前是</a:t>
             </a:r>
             <a:r>
               <a:rPr sz="2800" b="1">
@@ -7474,16 +7474,7 @@
                 </a:solidFill>
                 <a:latin typeface="Nunito Sans"/>
               </a:rPr>
-              <a:t>obligatoria</a:t>
-            </a:r>
-            <a:r>
-              <a:rPr sz="2800" b="0">
-                <a:solidFill>
-                  <a:srgbClr val="1F2A44"/>
-                </a:solidFill>
-                <a:latin typeface="Nunito Sans"/>
-              </a:rPr>
-              <a:t> hasta los 16 años</a:t>
+              <a:t>义务的</a:t>
             </a:r>
           </a:p>
         </p:txBody>

--- a/curso/pptx/S89.pptx
+++ b/curso/pptx/S89.pptx
@@ -4129,7 +4129,7 @@
                 </a:solidFill>
                 <a:latin typeface="Nunito Sans"/>
               </a:rPr>
-              <a:t>Omar 不知道四年级之后该怎么办。他喜欢修东西，数学也学得好。他的朋友圈都去上高中。（虚构的例子。）</a:t>
+              <a:t>一个男孩不知道四年级之后该怎么办。他喜欢修东西，数学也学得好。他的朋友圈都去上高中。（虚构的例子。）</a:t>
             </a:r>
           </a:p>
         </p:txBody>
@@ -4456,7 +4456,7 @@
                 </a:solidFill>
                 <a:latin typeface="Nunito Sans"/>
               </a:rPr>
-              <a:t>Naiara 认为她的试卷批错了：一个正确的答案得了零分。她想在课堂上大喊着抗议。（虚构的例子。）</a:t>
+              <a:t>一个女孩认为她的试卷批错了：一个正确的答案得了零分。她想在课堂上大喊着抗议。（虚构的例子。）</a:t>
             </a:r>
           </a:p>
         </p:txBody>
@@ -4801,7 +4801,7 @@
                 </a:solidFill>
                 <a:latin typeface="Nunito Sans"/>
               </a:rPr>
-              <a:t>Yasmin 要去上人文方向的高中。她热爱历史，想当记者。另外，她的三个朋友也去。（虚构的例子。）</a:t>
+              <a:t>一个女孩要去上人文方向的高中。她热爱历史，想当记者。另外，她的三个朋友也去。（虚构的例子。）</a:t>
             </a:r>
           </a:p>
         </p:txBody>
@@ -4899,7 +4899,7 @@
                 </a:solidFill>
                 <a:latin typeface="Nunito Sans"/>
               </a:rPr>
-              <a:t>但 Yasmin 有自己的理由：她喜欢历史，也知道自己想从事什么。</a:t>
+              <a:t>但这个女孩有自己的理由：她喜欢历史，也知道自己想从事什么。</a:t>
             </a:r>
           </a:p>
           <a:p>
@@ -6968,7 +6968,7 @@
                 </a:solidFill>
                 <a:latin typeface="Nunito Sans"/>
               </a:rPr>
-              <a:t>有人对 Maialen 说：“如果你不上大学，你就是个失败者。”</a:t>
+              <a:t>有人对一个女孩说：“如果你不上大学，你就是个失败者。”</a:t>
             </a:r>
           </a:p>
         </p:txBody>
